--- a/ppt/IoT01-Intro.pptx
+++ b/ppt/IoT01-Intro.pptx
@@ -5,10 +5,10 @@
     <p:sldMasterId id="2147483653" r:id="rId1"/>
   </p:sldMasterIdLst>
   <p:notesMasterIdLst>
-    <p:notesMasterId r:id="rId32"/>
+    <p:notesMasterId r:id="rId31"/>
   </p:notesMasterIdLst>
   <p:handoutMasterIdLst>
-    <p:handoutMasterId r:id="rId33"/>
+    <p:handoutMasterId r:id="rId32"/>
   </p:handoutMasterIdLst>
   <p:sldIdLst>
     <p:sldId id="264" r:id="rId2"/>
@@ -39,8 +39,7 @@
     <p:sldId id="290" r:id="rId27"/>
     <p:sldId id="295" r:id="rId28"/>
     <p:sldId id="277" r:id="rId29"/>
-    <p:sldId id="278" r:id="rId30"/>
-    <p:sldId id="276" r:id="rId31"/>
+    <p:sldId id="276" r:id="rId30"/>
   </p:sldIdLst>
   <p:sldSz cx="9144000" cy="6858000" type="screen4x3"/>
   <p:notesSz cx="6648450" cy="9782175"/>
@@ -3788,6 +3787,36 @@
           </a:prstGeom>
         </p:spPr>
       </p:pic>
+      <p:pic>
+        <p:nvPicPr>
+          <p:cNvPr id="5" name="Image 4">
+            <a:extLst>
+              <a:ext uri="{FF2B5EF4-FFF2-40B4-BE49-F238E27FC236}">
+                <a16:creationId xmlns:a16="http://schemas.microsoft.com/office/drawing/2014/main" id="{F3B64C74-B53E-03FA-F641-0481ECCA6D1D}"/>
+              </a:ext>
+            </a:extLst>
+          </p:cNvPr>
+          <p:cNvPicPr>
+            <a:picLocks noChangeAspect="1"/>
+          </p:cNvPicPr>
+          <p:nvPr/>
+        </p:nvPicPr>
+        <p:blipFill>
+          <a:blip r:embed="rId4"/>
+          <a:stretch>
+            <a:fillRect/>
+          </a:stretch>
+        </p:blipFill>
+        <p:spPr>
+          <a:xfrm>
+            <a:off x="2555776" y="4437112"/>
+            <a:ext cx="4315427" cy="1009791"/>
+          </a:xfrm>
+          <a:prstGeom prst="rect">
+            <a:avLst/>
+          </a:prstGeom>
+        </p:spPr>
+      </p:pic>
     </p:spTree>
   </p:cSld>
   <p:clrMapOvr>
@@ -6804,7 +6833,7 @@
           <a:p>
             <a:r>
               <a:rPr lang="fr-FR" dirty="0"/>
-              <a:t>Architecture</a:t>
+              <a:t>Les différentes approches</a:t>
             </a:r>
           </a:p>
         </p:txBody>
@@ -6826,15 +6855,53 @@
           <a:p>
             <a:r>
               <a:rPr lang="fr-FR" dirty="0"/>
-              <a:t>Réfléchissons à l'architecture de l'applications</a:t>
-            </a:r>
+              <a:t>Consommation électrique ?</a:t>
+            </a:r>
+          </a:p>
+          <a:p>
+            <a:r>
+              <a:rPr lang="fr-FR" dirty="0"/>
+              <a:t>Budget ?</a:t>
+            </a:r>
+          </a:p>
+          <a:p>
+            <a:r>
+              <a:rPr lang="fr-FR" dirty="0"/>
+              <a:t>Nomade ?</a:t>
+            </a:r>
+          </a:p>
+          <a:p>
+            <a:r>
+              <a:rPr lang="fr-FR" dirty="0"/>
+              <a:t>Embarqué ?</a:t>
+            </a:r>
+          </a:p>
+          <a:p>
+            <a:r>
+              <a:rPr lang="fr-FR" dirty="0"/>
+              <a:t>Communications ?</a:t>
+            </a:r>
+          </a:p>
+          <a:p>
+            <a:r>
+              <a:rPr lang="fr-FR" dirty="0"/>
+              <a:t>Filaire</a:t>
+            </a:r>
+            <a:r>
+              <a:rPr lang="fr-FR"/>
+              <a:t>, non-filaire ?</a:t>
+            </a:r>
+            <a:endParaRPr lang="fr-FR" dirty="0"/>
+          </a:p>
+          <a:p>
+            <a:endParaRPr lang="fr-FR" dirty="0"/>
           </a:p>
         </p:txBody>
       </p:sp>
     </p:spTree>
     <p:extLst>
       <p:ext uri="{BB962C8B-B14F-4D97-AF65-F5344CB8AC3E}">
-        <p14:creationId xmlns:p14="http://schemas.microsoft.com/office/powerpoint/2010/main" val="2725513376"/>
+        <p14:creationId xmlns:p14="http://schemas.microsoft.com/office/powerpoint/2010/main" val="1380503917"/>
       </p:ext>
     </p:extLst>
   </p:cSld>
@@ -7071,107 +7138,6 @@
     <p:extLst>
       <p:ext uri="{BB962C8B-B14F-4D97-AF65-F5344CB8AC3E}">
         <p14:creationId xmlns:p14="http://schemas.microsoft.com/office/powerpoint/2010/main" val="3793087618"/>
-      </p:ext>
-    </p:extLst>
-  </p:cSld>
-  <p:clrMapOvr>
-    <a:masterClrMapping/>
-  </p:clrMapOvr>
-</p:sld>
-</file>
-
-<file path=ppt/slides/slide30.xml><?xml version="1.0" encoding="utf-8"?>
-<p:sld xmlns:a="http://schemas.openxmlformats.org/drawingml/2006/main" xmlns:r="http://schemas.openxmlformats.org/officeDocument/2006/relationships" xmlns:p="http://schemas.openxmlformats.org/presentationml/2006/main">
-  <p:cSld>
-    <p:spTree>
-      <p:nvGrpSpPr>
-        <p:cNvPr id="1" name=""/>
-        <p:cNvGrpSpPr/>
-        <p:nvPr/>
-      </p:nvGrpSpPr>
-      <p:grpSpPr>
-        <a:xfrm>
-          <a:off x="0" y="0"/>
-          <a:ext cx="0" cy="0"/>
-          <a:chOff x="0" y="0"/>
-          <a:chExt cx="0" cy="0"/>
-        </a:xfrm>
-      </p:grpSpPr>
-      <p:sp>
-        <p:nvSpPr>
-          <p:cNvPr id="2" name="Titre 1"/>
-          <p:cNvSpPr>
-            <a:spLocks noGrp="1"/>
-          </p:cNvSpPr>
-          <p:nvPr>
-            <p:ph type="title"/>
-          </p:nvPr>
-        </p:nvSpPr>
-        <p:spPr/>
-        <p:txBody>
-          <a:bodyPr/>
-          <a:lstStyle/>
-          <a:p>
-            <a:r>
-              <a:rPr lang="fr-FR" dirty="0"/>
-              <a:t>Les différentes approches</a:t>
-            </a:r>
-          </a:p>
-        </p:txBody>
-      </p:sp>
-      <p:sp>
-        <p:nvSpPr>
-          <p:cNvPr id="3" name="Espace réservé du contenu 2"/>
-          <p:cNvSpPr>
-            <a:spLocks noGrp="1"/>
-          </p:cNvSpPr>
-          <p:nvPr>
-            <p:ph idx="1"/>
-          </p:nvPr>
-        </p:nvSpPr>
-        <p:spPr/>
-        <p:txBody>
-          <a:bodyPr/>
-          <a:lstStyle/>
-          <a:p>
-            <a:r>
-              <a:rPr lang="fr-FR" dirty="0"/>
-              <a:t>Consommation électrique ?</a:t>
-            </a:r>
-          </a:p>
-          <a:p>
-            <a:r>
-              <a:rPr lang="fr-FR" dirty="0"/>
-              <a:t>Budget ?</a:t>
-            </a:r>
-          </a:p>
-          <a:p>
-            <a:r>
-              <a:rPr lang="fr-FR" dirty="0"/>
-              <a:t>Nomade ?</a:t>
-            </a:r>
-          </a:p>
-          <a:p>
-            <a:r>
-              <a:rPr lang="fr-FR" dirty="0"/>
-              <a:t>Embarqué ?</a:t>
-            </a:r>
-          </a:p>
-          <a:p>
-            <a:r>
-              <a:rPr lang="fr-FR" dirty="0"/>
-              <a:t>Communications ?</a:t>
-            </a:r>
-          </a:p>
-          <a:p>
-            <a:endParaRPr lang="fr-FR" dirty="0"/>
-          </a:p>
-        </p:txBody>
-      </p:sp>
-    </p:spTree>
-    <p:extLst>
-      <p:ext uri="{BB962C8B-B14F-4D97-AF65-F5344CB8AC3E}">
-        <p14:creationId xmlns:p14="http://schemas.microsoft.com/office/powerpoint/2010/main" val="1380503917"/>
       </p:ext>
     </p:extLst>
   </p:cSld>

--- a/ppt/IoT01-Intro.pptx
+++ b/ppt/IoT01-Intro.pptx
@@ -5,10 +5,10 @@
     <p:sldMasterId id="2147483653" r:id="rId1"/>
   </p:sldMasterIdLst>
   <p:notesMasterIdLst>
-    <p:notesMasterId r:id="rId31"/>
+    <p:notesMasterId r:id="rId32"/>
   </p:notesMasterIdLst>
   <p:handoutMasterIdLst>
-    <p:handoutMasterId r:id="rId32"/>
+    <p:handoutMasterId r:id="rId33"/>
   </p:handoutMasterIdLst>
   <p:sldIdLst>
     <p:sldId id="264" r:id="rId2"/>
@@ -40,6 +40,7 @@
     <p:sldId id="295" r:id="rId28"/>
     <p:sldId id="277" r:id="rId29"/>
     <p:sldId id="276" r:id="rId30"/>
+    <p:sldId id="296" r:id="rId31"/>
   </p:sldIdLst>
   <p:sldSz cx="9144000" cy="6858000" type="screen4x3"/>
   <p:notesSz cx="6648450" cy="9782175"/>
@@ -7138,6 +7139,116 @@
     <p:extLst>
       <p:ext uri="{BB962C8B-B14F-4D97-AF65-F5344CB8AC3E}">
         <p14:creationId xmlns:p14="http://schemas.microsoft.com/office/powerpoint/2010/main" val="3793087618"/>
+      </p:ext>
+    </p:extLst>
+  </p:cSld>
+  <p:clrMapOvr>
+    <a:masterClrMapping/>
+  </p:clrMapOvr>
+</p:sld>
+</file>
+
+<file path=ppt/slides/slide30.xml><?xml version="1.0" encoding="utf-8"?>
+<p:sld xmlns:a="http://schemas.openxmlformats.org/drawingml/2006/main" xmlns:r="http://schemas.openxmlformats.org/officeDocument/2006/relationships" xmlns:p="http://schemas.openxmlformats.org/presentationml/2006/main">
+  <p:cSld>
+    <p:spTree>
+      <p:nvGrpSpPr>
+        <p:cNvPr id="1" name=""/>
+        <p:cNvGrpSpPr/>
+        <p:nvPr/>
+      </p:nvGrpSpPr>
+      <p:grpSpPr>
+        <a:xfrm>
+          <a:off x="0" y="0"/>
+          <a:ext cx="0" cy="0"/>
+          <a:chOff x="0" y="0"/>
+          <a:chExt cx="0" cy="0"/>
+        </a:xfrm>
+      </p:grpSpPr>
+      <p:sp>
+        <p:nvSpPr>
+          <p:cNvPr id="2" name="Titre 1">
+            <a:extLst>
+              <a:ext uri="{FF2B5EF4-FFF2-40B4-BE49-F238E27FC236}">
+                <a16:creationId xmlns:a16="http://schemas.microsoft.com/office/drawing/2014/main" id="{02728C56-AAB1-E5D0-9117-345BE439137F}"/>
+              </a:ext>
+            </a:extLst>
+          </p:cNvPr>
+          <p:cNvSpPr>
+            <a:spLocks noGrp="1"/>
+          </p:cNvSpPr>
+          <p:nvPr>
+            <p:ph type="title"/>
+          </p:nvPr>
+        </p:nvSpPr>
+        <p:spPr/>
+        <p:txBody>
+          <a:bodyPr/>
+          <a:lstStyle/>
+          <a:p>
+            <a:endParaRPr lang="fr-FR"/>
+          </a:p>
+        </p:txBody>
+      </p:sp>
+      <p:sp>
+        <p:nvSpPr>
+          <p:cNvPr id="3" name="Espace réservé du contenu 2">
+            <a:extLst>
+              <a:ext uri="{FF2B5EF4-FFF2-40B4-BE49-F238E27FC236}">
+                <a16:creationId xmlns:a16="http://schemas.microsoft.com/office/drawing/2014/main" id="{ECE3CAB5-3524-670E-91BB-819442DBE729}"/>
+              </a:ext>
+            </a:extLst>
+          </p:cNvPr>
+          <p:cNvSpPr>
+            <a:spLocks noGrp="1"/>
+          </p:cNvSpPr>
+          <p:nvPr>
+            <p:ph idx="1"/>
+          </p:nvPr>
+        </p:nvSpPr>
+        <p:spPr/>
+        <p:txBody>
+          <a:bodyPr/>
+          <a:lstStyle/>
+          <a:p>
+            <a:endParaRPr lang="fr-FR"/>
+          </a:p>
+        </p:txBody>
+      </p:sp>
+      <p:pic>
+        <p:nvPicPr>
+          <p:cNvPr id="5" name="Image 4">
+            <a:extLst>
+              <a:ext uri="{FF2B5EF4-FFF2-40B4-BE49-F238E27FC236}">
+                <a16:creationId xmlns:a16="http://schemas.microsoft.com/office/drawing/2014/main" id="{E421D0F7-5869-E65C-F0B3-3A37706894AE}"/>
+              </a:ext>
+            </a:extLst>
+          </p:cNvPr>
+          <p:cNvPicPr>
+            <a:picLocks noChangeAspect="1"/>
+          </p:cNvPicPr>
+          <p:nvPr/>
+        </p:nvPicPr>
+        <p:blipFill>
+          <a:blip r:embed="rId2"/>
+          <a:stretch>
+            <a:fillRect/>
+          </a:stretch>
+        </p:blipFill>
+        <p:spPr>
+          <a:xfrm>
+            <a:off x="-208769" y="0"/>
+            <a:ext cx="9561538" cy="6885519"/>
+          </a:xfrm>
+          <a:prstGeom prst="rect">
+            <a:avLst/>
+          </a:prstGeom>
+        </p:spPr>
+      </p:pic>
+    </p:spTree>
+    <p:extLst>
+      <p:ext uri="{BB962C8B-B14F-4D97-AF65-F5344CB8AC3E}">
+        <p14:creationId xmlns:p14="http://schemas.microsoft.com/office/powerpoint/2010/main" val="3139760694"/>
       </p:ext>
     </p:extLst>
   </p:cSld>
